--- a/assets/powerpoints/module-n6-recherche/E1-je-me-lance.pptx
+++ b/assets/powerpoints/module-n6-recherche/E1-je-me-lance.pptx
@@ -6067,7 +6067,97 @@
                 </a:solidFill>
                 <a:latin typeface="Verdana"/>
               </a:rPr>
-              <a:t>Dans l'activité interactive : &lt;b&gt;commis à l'inventaire&lt;/b&gt; chez Boisverte, &lt;b&gt;aide-cuisinier&lt;/b&gt; dans un restaurant de quartier, &lt;b&gt;préposé à l'entretien&lt;/b&gt; dans un immeuble de bureaux. Vous choisissez d'être le &lt;b&gt;candidat&lt;/b&gt; ou l'&lt;b&gt;employeur&lt;/b&gt; — faites les deux : on comprend mieux les questions quand on a eu à les poser.</a:t>
+              <a:t>Dans l'activité interactive : </a:t>
+            </a:r>
+            <a:r>
+              <a:rPr sz="2000" b="1" i="0">
+                <a:solidFill>
+                  <a:srgbClr val="4B4F52"/>
+                </a:solidFill>
+                <a:latin typeface="Verdana"/>
+              </a:rPr>
+              <a:t>commis à l'inventaire</a:t>
+            </a:r>
+            <a:r>
+              <a:rPr sz="2000" b="0" i="0">
+                <a:solidFill>
+                  <a:srgbClr val="4B4F52"/>
+                </a:solidFill>
+                <a:latin typeface="Verdana"/>
+              </a:rPr>
+              <a:t> chez Boisverte, </a:t>
+            </a:r>
+            <a:r>
+              <a:rPr sz="2000" b="1" i="0">
+                <a:solidFill>
+                  <a:srgbClr val="4B4F52"/>
+                </a:solidFill>
+                <a:latin typeface="Verdana"/>
+              </a:rPr>
+              <a:t>aide-cuisinier</a:t>
+            </a:r>
+            <a:r>
+              <a:rPr sz="2000" b="0" i="0">
+                <a:solidFill>
+                  <a:srgbClr val="4B4F52"/>
+                </a:solidFill>
+                <a:latin typeface="Verdana"/>
+              </a:rPr>
+              <a:t> dans un restaurant de quartier, </a:t>
+            </a:r>
+            <a:r>
+              <a:rPr sz="2000" b="1" i="0">
+                <a:solidFill>
+                  <a:srgbClr val="4B4F52"/>
+                </a:solidFill>
+                <a:latin typeface="Verdana"/>
+              </a:rPr>
+              <a:t>préposé à l'entretien</a:t>
+            </a:r>
+            <a:r>
+              <a:rPr sz="2000" b="0" i="0">
+                <a:solidFill>
+                  <a:srgbClr val="4B4F52"/>
+                </a:solidFill>
+                <a:latin typeface="Verdana"/>
+              </a:rPr>
+              <a:t> dans un immeuble de bureaux. Vous choisissez d'être le </a:t>
+            </a:r>
+            <a:r>
+              <a:rPr sz="2000" b="1" i="0">
+                <a:solidFill>
+                  <a:srgbClr val="4B4F52"/>
+                </a:solidFill>
+                <a:latin typeface="Verdana"/>
+              </a:rPr>
+              <a:t>candidat</a:t>
+            </a:r>
+            <a:r>
+              <a:rPr sz="2000" b="0" i="0">
+                <a:solidFill>
+                  <a:srgbClr val="4B4F52"/>
+                </a:solidFill>
+                <a:latin typeface="Verdana"/>
+              </a:rPr>
+              <a:t> ou l'</a:t>
+            </a:r>
+            <a:r>
+              <a:rPr sz="2000" b="1" i="0">
+                <a:solidFill>
+                  <a:srgbClr val="4B4F52"/>
+                </a:solidFill>
+                <a:latin typeface="Verdana"/>
+              </a:rPr>
+              <a:t>employeur</a:t>
+            </a:r>
+            <a:r>
+              <a:rPr sz="2000" b="0" i="0">
+                <a:solidFill>
+                  <a:srgbClr val="4B4F52"/>
+                </a:solidFill>
+                <a:latin typeface="Verdana"/>
+              </a:rPr>
+              <a:t> — faites les deux : on comprend mieux les questions quand on a eu à les poser.</a:t>
             </a:r>
           </a:p>
         </p:txBody>
